--- a/PreseentacionPlay.GG.pptx
+++ b/PreseentacionPlay.GG.pptx
@@ -2016,7 +2016,7 @@
         <p:spPr>
           <a:xfrm>
             <a:off x="9061450" y="6082030"/>
-            <a:ext cx="4000500" cy="228600"/>
+            <a:ext cx="4000500" cy="623570"/>
           </a:xfrm>
           <a:prstGeom prst="rect">
             <a:avLst/>
@@ -2050,9 +2050,9 @@
               </a:defRPr>
             </a:pPr>
             <a:r>
-              <a:rPr lang="es-MX" sz="1125" b="0" dirty="0">
-                <a:solidFill>
-                  <a:srgbClr val="94A3B8"/>
+              <a:rPr lang="es-MX" sz="1125" b="1" i="1" dirty="0">
+                <a:solidFill>
+                  <a:schemeClr val="bg1"/>
                 </a:solidFill>
                 <a:latin typeface="Aptos"/>
                 <a:ea typeface="Aptos"/>
@@ -2073,37 +2073,15 @@
               </a:defRPr>
             </a:pPr>
             <a:r>
-              <a:rPr lang="es-MX" sz="1125" dirty="0">
-                <a:solidFill>
-                  <a:srgbClr val="94A3B8"/>
-                </a:solidFill>
-                <a:latin typeface="Aptos"/>
-                <a:ea typeface="Aptos"/>
-                <a:cs typeface="Aptos"/>
-              </a:rPr>
-              <a:t>	</a:t>
-            </a:r>
-            <a:r>
-              <a:rPr lang="es-MX" sz="1125" dirty="0" err="1">
-                <a:solidFill>
-                  <a:srgbClr val="94A3B8"/>
-                </a:solidFill>
-                <a:latin typeface="Aptos"/>
-                <a:ea typeface="Aptos"/>
-                <a:cs typeface="Aptos"/>
-              </a:rPr>
-              <a:t>Caludio</a:t>
-            </a:r>
-            <a:r>
-              <a:rPr lang="es-MX" sz="1125" dirty="0">
-                <a:solidFill>
-                  <a:srgbClr val="94A3B8"/>
-                </a:solidFill>
-                <a:latin typeface="Aptos"/>
-                <a:ea typeface="Aptos"/>
-                <a:cs typeface="Aptos"/>
-              </a:rPr>
-              <a:t> Alberto Jaime Calderon</a:t>
+              <a:rPr lang="es-MX" sz="1125" b="1" i="1" dirty="0">
+                <a:solidFill>
+                  <a:schemeClr val="bg1"/>
+                </a:solidFill>
+                <a:latin typeface="Aptos"/>
+                <a:ea typeface="Aptos"/>
+                <a:cs typeface="Aptos"/>
+              </a:rPr>
+              <a:t>	Claudio Alberto Jaime Calderon</a:t>
             </a:r>
           </a:p>
           <a:p>
@@ -2118,9 +2096,9 @@
               </a:defRPr>
             </a:pPr>
             <a:r>
-              <a:rPr lang="es-MX" sz="1125" b="0" dirty="0">
-                <a:solidFill>
-                  <a:srgbClr val="94A3B8"/>
+              <a:rPr lang="es-MX" sz="1125" b="1" i="1" dirty="0">
+                <a:solidFill>
+                  <a:schemeClr val="bg1"/>
                 </a:solidFill>
                 <a:latin typeface="Aptos"/>
                 <a:ea typeface="Aptos"/>
@@ -2128,9 +2106,9 @@
               </a:rPr>
               <a:t>	Martin Ignacio González Varela</a:t>
             </a:r>
-            <a:endParaRPr sz="1125" b="0" dirty="0">
+            <a:endParaRPr sz="1125" b="1" i="1" dirty="0">
               <a:solidFill>
-                <a:srgbClr val="94A3B8"/>
+                <a:schemeClr val="bg1"/>
               </a:solidFill>
               <a:latin typeface="Aptos"/>
               <a:ea typeface="Aptos"/>
